--- a/Project2_1/DB산출물/05_ERD.pptx
+++ b/Project2_1/DB산출물/05_ERD.pptx
@@ -259,7 +259,7 @@
           <a:p>
             <a:fld id="{C6EE36B7-F0BA-4AB3-BD67-20AC5E002CC9}" type="datetimeFigureOut">
               <a:rPr lang="ko-KR" altLang="en-US" smtClean="0"/>
-              <a:t>2026-05-21</a:t>
+              <a:t>2026-05-22</a:t>
             </a:fld>
             <a:endParaRPr lang="ko-KR" altLang="en-US"/>
           </a:p>
@@ -457,7 +457,7 @@
           <a:p>
             <a:fld id="{C6EE36B7-F0BA-4AB3-BD67-20AC5E002CC9}" type="datetimeFigureOut">
               <a:rPr lang="ko-KR" altLang="en-US" smtClean="0"/>
-              <a:t>2026-05-21</a:t>
+              <a:t>2026-05-22</a:t>
             </a:fld>
             <a:endParaRPr lang="ko-KR" altLang="en-US"/>
           </a:p>
@@ -665,7 +665,7 @@
           <a:p>
             <a:fld id="{C6EE36B7-F0BA-4AB3-BD67-20AC5E002CC9}" type="datetimeFigureOut">
               <a:rPr lang="ko-KR" altLang="en-US" smtClean="0"/>
-              <a:t>2026-05-21</a:t>
+              <a:t>2026-05-22</a:t>
             </a:fld>
             <a:endParaRPr lang="ko-KR" altLang="en-US"/>
           </a:p>
@@ -863,7 +863,7 @@
           <a:p>
             <a:fld id="{C6EE36B7-F0BA-4AB3-BD67-20AC5E002CC9}" type="datetimeFigureOut">
               <a:rPr lang="ko-KR" altLang="en-US" smtClean="0"/>
-              <a:t>2026-05-21</a:t>
+              <a:t>2026-05-22</a:t>
             </a:fld>
             <a:endParaRPr lang="ko-KR" altLang="en-US"/>
           </a:p>
@@ -1138,7 +1138,7 @@
           <a:p>
             <a:fld id="{C6EE36B7-F0BA-4AB3-BD67-20AC5E002CC9}" type="datetimeFigureOut">
               <a:rPr lang="ko-KR" altLang="en-US" smtClean="0"/>
-              <a:t>2026-05-21</a:t>
+              <a:t>2026-05-22</a:t>
             </a:fld>
             <a:endParaRPr lang="ko-KR" altLang="en-US"/>
           </a:p>
@@ -1403,7 +1403,7 @@
           <a:p>
             <a:fld id="{C6EE36B7-F0BA-4AB3-BD67-20AC5E002CC9}" type="datetimeFigureOut">
               <a:rPr lang="ko-KR" altLang="en-US" smtClean="0"/>
-              <a:t>2026-05-21</a:t>
+              <a:t>2026-05-22</a:t>
             </a:fld>
             <a:endParaRPr lang="ko-KR" altLang="en-US"/>
           </a:p>
@@ -1815,7 +1815,7 @@
           <a:p>
             <a:fld id="{C6EE36B7-F0BA-4AB3-BD67-20AC5E002CC9}" type="datetimeFigureOut">
               <a:rPr lang="ko-KR" altLang="en-US" smtClean="0"/>
-              <a:t>2026-05-21</a:t>
+              <a:t>2026-05-22</a:t>
             </a:fld>
             <a:endParaRPr lang="ko-KR" altLang="en-US"/>
           </a:p>
@@ -1956,7 +1956,7 @@
           <a:p>
             <a:fld id="{C6EE36B7-F0BA-4AB3-BD67-20AC5E002CC9}" type="datetimeFigureOut">
               <a:rPr lang="ko-KR" altLang="en-US" smtClean="0"/>
-              <a:t>2026-05-21</a:t>
+              <a:t>2026-05-22</a:t>
             </a:fld>
             <a:endParaRPr lang="ko-KR" altLang="en-US"/>
           </a:p>
@@ -2069,7 +2069,7 @@
           <a:p>
             <a:fld id="{C6EE36B7-F0BA-4AB3-BD67-20AC5E002CC9}" type="datetimeFigureOut">
               <a:rPr lang="ko-KR" altLang="en-US" smtClean="0"/>
-              <a:t>2026-05-21</a:t>
+              <a:t>2026-05-22</a:t>
             </a:fld>
             <a:endParaRPr lang="ko-KR" altLang="en-US"/>
           </a:p>
@@ -2380,7 +2380,7 @@
           <a:p>
             <a:fld id="{C6EE36B7-F0BA-4AB3-BD67-20AC5E002CC9}" type="datetimeFigureOut">
               <a:rPr lang="ko-KR" altLang="en-US" smtClean="0"/>
-              <a:t>2026-05-21</a:t>
+              <a:t>2026-05-22</a:t>
             </a:fld>
             <a:endParaRPr lang="ko-KR" altLang="en-US"/>
           </a:p>
@@ -2668,7 +2668,7 @@
           <a:p>
             <a:fld id="{C6EE36B7-F0BA-4AB3-BD67-20AC5E002CC9}" type="datetimeFigureOut">
               <a:rPr lang="ko-KR" altLang="en-US" smtClean="0"/>
-              <a:t>2026-05-21</a:t>
+              <a:t>2026-05-22</a:t>
             </a:fld>
             <a:endParaRPr lang="ko-KR" altLang="en-US"/>
           </a:p>
@@ -2909,7 +2909,7 @@
           <a:p>
             <a:fld id="{C6EE36B7-F0BA-4AB3-BD67-20AC5E002CC9}" type="datetimeFigureOut">
               <a:rPr lang="ko-KR" altLang="en-US" smtClean="0"/>
-              <a:t>2026-05-21</a:t>
+              <a:t>2026-05-22</a:t>
             </a:fld>
             <a:endParaRPr lang="ko-KR" altLang="en-US"/>
           </a:p>
@@ -4004,14 +4004,14 @@
           <p:nvPr>
             <p:extLst>
               <p:ext uri="{D42A27DB-BD31-4B8C-83A1-F6EECF244321}">
-                <p14:modId xmlns:p14="http://schemas.microsoft.com/office/powerpoint/2010/main" val="4106966509"/>
+                <p14:modId xmlns:p14="http://schemas.microsoft.com/office/powerpoint/2010/main" val="326637581"/>
               </p:ext>
             </p:extLst>
           </p:nvPr>
         </p:nvGraphicFramePr>
         <p:xfrm>
-          <a:off x="8157631" y="167133"/>
-          <a:ext cx="3812911" cy="5669280"/>
+          <a:off x="8161867" y="167133"/>
+          <a:ext cx="3808675" cy="5455920"/>
         </p:xfrm>
         <a:graphic>
           <a:graphicData uri="http://schemas.openxmlformats.org/drawingml/2006/table">
@@ -4020,7 +4020,7 @@
                 <a:tableStyleId>{46F890A9-2807-4EBB-B81D-B2AA78EC7F39}</a:tableStyleId>
               </a:tblPr>
               <a:tblGrid>
-                <a:gridCol w="1206141">
+                <a:gridCol w="1201905">
                   <a:extLst>
                     <a:ext uri="{9D8B030D-6E8A-4147-A177-3AD203B41FA5}">
                       <a16:colId xmlns:a16="http://schemas.microsoft.com/office/drawing/2014/main" val="3443687360"/>
@@ -5073,67 +5073,6 @@
                 <a:extLst>
                   <a:ext uri="{0D108BD9-81ED-4DB2-BD59-A6C34878D82A}">
                     <a16:rowId xmlns:a16="http://schemas.microsoft.com/office/drawing/2014/main" val="290885351"/>
-                  </a:ext>
-                </a:extLst>
-              </a:tr>
-              <a:tr h="156429">
-                <a:tc>
-                  <a:txBody>
-                    <a:bodyPr/>
-                    <a:lstStyle/>
-                    <a:p>
-                      <a:pPr algn="ctr" latinLnBrk="1"/>
-                      <a:r>
-                        <a:rPr lang="en-US" altLang="ko-KR" sz="800" dirty="0">
-                          <a:latin typeface="+mj-lt"/>
-                        </a:rPr>
-                        <a:t>HE_TG</a:t>
-                      </a:r>
-                      <a:endParaRPr lang="ko-KR" altLang="en-US" sz="800" dirty="0">
-                        <a:latin typeface="+mj-lt"/>
-                      </a:endParaRPr>
-                    </a:p>
-                  </a:txBody>
-                  <a:tcPr anchor="ctr"/>
-                </a:tc>
-                <a:tc>
-                  <a:txBody>
-                    <a:bodyPr/>
-                    <a:lstStyle/>
-                    <a:p>
-                      <a:pPr algn="ctr" latinLnBrk="1"/>
-                      <a:r>
-                        <a:rPr lang="en-US" altLang="ko-KR" sz="800" dirty="0">
-                          <a:latin typeface="+mj-lt"/>
-                        </a:rPr>
-                        <a:t>NUMBER(6,1)</a:t>
-                      </a:r>
-                      <a:endParaRPr lang="ko-KR" altLang="en-US" sz="800" dirty="0">
-                        <a:latin typeface="+mj-lt"/>
-                      </a:endParaRPr>
-                    </a:p>
-                  </a:txBody>
-                  <a:tcPr anchor="ctr"/>
-                </a:tc>
-                <a:tc>
-                  <a:txBody>
-                    <a:bodyPr/>
-                    <a:lstStyle/>
-                    <a:p>
-                      <a:pPr algn="ctr" latinLnBrk="1"/>
-                      <a:r>
-                        <a:rPr lang="ko-KR" altLang="en-US" sz="800" dirty="0">
-                          <a:latin typeface="+mj-lt"/>
-                        </a:rPr>
-                        <a:t>중성지방</a:t>
-                      </a:r>
-                    </a:p>
-                  </a:txBody>
-                  <a:tcPr anchor="ctr"/>
-                </a:tc>
-                <a:extLst>
-                  <a:ext uri="{0D108BD9-81ED-4DB2-BD59-A6C34878D82A}">
-                    <a16:rowId xmlns:a16="http://schemas.microsoft.com/office/drawing/2014/main" val="40277254"/>
                   </a:ext>
                 </a:extLst>
               </a:tr>

--- a/Project2_1/DB산출물/05_ERD.pptx
+++ b/Project2_1/DB산출물/05_ERD.pptx
@@ -259,7 +259,7 @@
           <a:p>
             <a:fld id="{C6EE36B7-F0BA-4AB3-BD67-20AC5E002CC9}" type="datetimeFigureOut">
               <a:rPr lang="ko-KR" altLang="en-US" smtClean="0"/>
-              <a:t>2026-05-22</a:t>
+              <a:t>2026-05-23</a:t>
             </a:fld>
             <a:endParaRPr lang="ko-KR" altLang="en-US"/>
           </a:p>
@@ -457,7 +457,7 @@
           <a:p>
             <a:fld id="{C6EE36B7-F0BA-4AB3-BD67-20AC5E002CC9}" type="datetimeFigureOut">
               <a:rPr lang="ko-KR" altLang="en-US" smtClean="0"/>
-              <a:t>2026-05-22</a:t>
+              <a:t>2026-05-23</a:t>
             </a:fld>
             <a:endParaRPr lang="ko-KR" altLang="en-US"/>
           </a:p>
@@ -665,7 +665,7 @@
           <a:p>
             <a:fld id="{C6EE36B7-F0BA-4AB3-BD67-20AC5E002CC9}" type="datetimeFigureOut">
               <a:rPr lang="ko-KR" altLang="en-US" smtClean="0"/>
-              <a:t>2026-05-22</a:t>
+              <a:t>2026-05-23</a:t>
             </a:fld>
             <a:endParaRPr lang="ko-KR" altLang="en-US"/>
           </a:p>
@@ -863,7 +863,7 @@
           <a:p>
             <a:fld id="{C6EE36B7-F0BA-4AB3-BD67-20AC5E002CC9}" type="datetimeFigureOut">
               <a:rPr lang="ko-KR" altLang="en-US" smtClean="0"/>
-              <a:t>2026-05-22</a:t>
+              <a:t>2026-05-23</a:t>
             </a:fld>
             <a:endParaRPr lang="ko-KR" altLang="en-US"/>
           </a:p>
@@ -1138,7 +1138,7 @@
           <a:p>
             <a:fld id="{C6EE36B7-F0BA-4AB3-BD67-20AC5E002CC9}" type="datetimeFigureOut">
               <a:rPr lang="ko-KR" altLang="en-US" smtClean="0"/>
-              <a:t>2026-05-22</a:t>
+              <a:t>2026-05-23</a:t>
             </a:fld>
             <a:endParaRPr lang="ko-KR" altLang="en-US"/>
           </a:p>
@@ -1403,7 +1403,7 @@
           <a:p>
             <a:fld id="{C6EE36B7-F0BA-4AB3-BD67-20AC5E002CC9}" type="datetimeFigureOut">
               <a:rPr lang="ko-KR" altLang="en-US" smtClean="0"/>
-              <a:t>2026-05-22</a:t>
+              <a:t>2026-05-23</a:t>
             </a:fld>
             <a:endParaRPr lang="ko-KR" altLang="en-US"/>
           </a:p>
@@ -1815,7 +1815,7 @@
           <a:p>
             <a:fld id="{C6EE36B7-F0BA-4AB3-BD67-20AC5E002CC9}" type="datetimeFigureOut">
               <a:rPr lang="ko-KR" altLang="en-US" smtClean="0"/>
-              <a:t>2026-05-22</a:t>
+              <a:t>2026-05-23</a:t>
             </a:fld>
             <a:endParaRPr lang="ko-KR" altLang="en-US"/>
           </a:p>
@@ -1956,7 +1956,7 @@
           <a:p>
             <a:fld id="{C6EE36B7-F0BA-4AB3-BD67-20AC5E002CC9}" type="datetimeFigureOut">
               <a:rPr lang="ko-KR" altLang="en-US" smtClean="0"/>
-              <a:t>2026-05-22</a:t>
+              <a:t>2026-05-23</a:t>
             </a:fld>
             <a:endParaRPr lang="ko-KR" altLang="en-US"/>
           </a:p>
@@ -2069,7 +2069,7 @@
           <a:p>
             <a:fld id="{C6EE36B7-F0BA-4AB3-BD67-20AC5E002CC9}" type="datetimeFigureOut">
               <a:rPr lang="ko-KR" altLang="en-US" smtClean="0"/>
-              <a:t>2026-05-22</a:t>
+              <a:t>2026-05-23</a:t>
             </a:fld>
             <a:endParaRPr lang="ko-KR" altLang="en-US"/>
           </a:p>
@@ -2380,7 +2380,7 @@
           <a:p>
             <a:fld id="{C6EE36B7-F0BA-4AB3-BD67-20AC5E002CC9}" type="datetimeFigureOut">
               <a:rPr lang="ko-KR" altLang="en-US" smtClean="0"/>
-              <a:t>2026-05-22</a:t>
+              <a:t>2026-05-23</a:t>
             </a:fld>
             <a:endParaRPr lang="ko-KR" altLang="en-US"/>
           </a:p>
@@ -2668,7 +2668,7 @@
           <a:p>
             <a:fld id="{C6EE36B7-F0BA-4AB3-BD67-20AC5E002CC9}" type="datetimeFigureOut">
               <a:rPr lang="ko-KR" altLang="en-US" smtClean="0"/>
-              <a:t>2026-05-22</a:t>
+              <a:t>2026-05-23</a:t>
             </a:fld>
             <a:endParaRPr lang="ko-KR" altLang="en-US"/>
           </a:p>
@@ -2909,7 +2909,7 @@
           <a:p>
             <a:fld id="{C6EE36B7-F0BA-4AB3-BD67-20AC5E002CC9}" type="datetimeFigureOut">
               <a:rPr lang="ko-KR" altLang="en-US" smtClean="0"/>
-              <a:t>2026-05-22</a:t>
+              <a:t>2026-05-23</a:t>
             </a:fld>
             <a:endParaRPr lang="ko-KR" altLang="en-US"/>
           </a:p>
@@ -4004,14 +4004,14 @@
           <p:nvPr>
             <p:extLst>
               <p:ext uri="{D42A27DB-BD31-4B8C-83A1-F6EECF244321}">
-                <p14:modId xmlns:p14="http://schemas.microsoft.com/office/powerpoint/2010/main" val="326637581"/>
+                <p14:modId xmlns:p14="http://schemas.microsoft.com/office/powerpoint/2010/main" val="73662598"/>
               </p:ext>
             </p:extLst>
           </p:nvPr>
         </p:nvGraphicFramePr>
         <p:xfrm>
           <a:off x="8161867" y="167133"/>
-          <a:ext cx="3808675" cy="5455920"/>
+          <a:ext cx="3869262" cy="5366457"/>
         </p:xfrm>
         <a:graphic>
           <a:graphicData uri="http://schemas.openxmlformats.org/drawingml/2006/table">
@@ -4020,21 +4020,21 @@
                 <a:tableStyleId>{46F890A9-2807-4EBB-B81D-B2AA78EC7F39}</a:tableStyleId>
               </a:tblPr>
               <a:tblGrid>
-                <a:gridCol w="1201905">
+                <a:gridCol w="1221024">
                   <a:extLst>
                     <a:ext uri="{9D8B030D-6E8A-4147-A177-3AD203B41FA5}">
                       <a16:colId xmlns:a16="http://schemas.microsoft.com/office/drawing/2014/main" val="3443687360"/>
                     </a:ext>
                   </a:extLst>
                 </a:gridCol>
-                <a:gridCol w="1180553">
+                <a:gridCol w="1199333">
                   <a:extLst>
                     <a:ext uri="{9D8B030D-6E8A-4147-A177-3AD203B41FA5}">
                       <a16:colId xmlns:a16="http://schemas.microsoft.com/office/drawing/2014/main" val="2170985730"/>
                     </a:ext>
                   </a:extLst>
                 </a:gridCol>
-                <a:gridCol w="1426217">
+                <a:gridCol w="1448905">
                   <a:extLst>
                     <a:ext uri="{9D8B030D-6E8A-4147-A177-3AD203B41FA5}">
                       <a16:colId xmlns:a16="http://schemas.microsoft.com/office/drawing/2014/main" val="1969969579"/>
@@ -7384,13 +7384,13 @@
           <p:nvPr>
             <p:extLst>
               <p:ext uri="{D42A27DB-BD31-4B8C-83A1-F6EECF244321}">
-                <p14:modId xmlns:p14="http://schemas.microsoft.com/office/powerpoint/2010/main" val="4101741074"/>
+                <p14:modId xmlns:p14="http://schemas.microsoft.com/office/powerpoint/2010/main" val="134699410"/>
               </p:ext>
             </p:extLst>
           </p:nvPr>
         </p:nvGraphicFramePr>
         <p:xfrm>
-          <a:off x="506428" y="4842168"/>
+          <a:off x="506428" y="5137391"/>
           <a:ext cx="4384656" cy="1280160"/>
         </p:xfrm>
         <a:graphic>
@@ -7847,7 +7847,7 @@
         <p:spPr>
           <a:xfrm>
             <a:off x="5579534" y="913474"/>
-            <a:ext cx="0" cy="4687304"/>
+            <a:ext cx="0" cy="4915904"/>
           </a:xfrm>
           <a:prstGeom prst="line">
             <a:avLst/>
@@ -7884,7 +7884,7 @@
         </p:nvCxnSpPr>
         <p:spPr>
           <a:xfrm>
-            <a:off x="5033431" y="5600778"/>
+            <a:off x="5033431" y="5829378"/>
             <a:ext cx="546103" cy="0"/>
           </a:xfrm>
           <a:prstGeom prst="line">
@@ -7922,7 +7922,7 @@
         </p:nvCxnSpPr>
         <p:spPr>
           <a:xfrm flipH="1" flipV="1">
-            <a:off x="4902118" y="5469465"/>
+            <a:off x="4902118" y="5706529"/>
             <a:ext cx="131314" cy="131314"/>
           </a:xfrm>
           <a:prstGeom prst="line">
@@ -7960,7 +7960,7 @@
         </p:nvCxnSpPr>
         <p:spPr>
           <a:xfrm flipH="1">
-            <a:off x="4902117" y="5600778"/>
+            <a:off x="4902117" y="5837842"/>
             <a:ext cx="131315" cy="131314"/>
           </a:xfrm>
           <a:prstGeom prst="line">
@@ -8032,7 +8032,7 @@
         </p:nvSpPr>
         <p:spPr>
           <a:xfrm flipH="1">
-            <a:off x="4972559" y="5427400"/>
+            <a:off x="4972559" y="5656000"/>
             <a:ext cx="194730" cy="215444"/>
           </a:xfrm>
           <a:prstGeom prst="rect">
@@ -8848,6 +8848,193 @@
           </a:p>
         </p:txBody>
       </p:sp>
+      <p:cxnSp>
+        <p:nvCxnSpPr>
+          <p:cNvPr id="33" name="직선 연결선 32">
+            <a:extLst>
+              <a:ext uri="{FF2B5EF4-FFF2-40B4-BE49-F238E27FC236}">
+                <a16:creationId xmlns:a16="http://schemas.microsoft.com/office/drawing/2014/main" id="{C17DB8DC-0529-405F-A70B-69774384FB27}"/>
+              </a:ext>
+            </a:extLst>
+          </p:cNvPr>
+          <p:cNvCxnSpPr>
+            <a:cxnSpLocks/>
+          </p:cNvCxnSpPr>
+          <p:nvPr/>
+        </p:nvCxnSpPr>
+        <p:spPr>
+          <a:xfrm flipH="1">
+            <a:off x="2542787" y="5052369"/>
+            <a:ext cx="110055" cy="50802"/>
+          </a:xfrm>
+          <a:prstGeom prst="line">
+            <a:avLst/>
+          </a:prstGeom>
+        </p:spPr>
+        <p:style>
+          <a:lnRef idx="3">
+            <a:schemeClr val="dk1"/>
+          </a:lnRef>
+          <a:fillRef idx="0">
+            <a:schemeClr val="dk1"/>
+          </a:fillRef>
+          <a:effectRef idx="2">
+            <a:schemeClr val="dk1"/>
+          </a:effectRef>
+          <a:fontRef idx="minor">
+            <a:schemeClr val="tx1"/>
+          </a:fontRef>
+        </p:style>
+      </p:cxnSp>
+      <p:cxnSp>
+        <p:nvCxnSpPr>
+          <p:cNvPr id="35" name="직선 연결선 34">
+            <a:extLst>
+              <a:ext uri="{FF2B5EF4-FFF2-40B4-BE49-F238E27FC236}">
+                <a16:creationId xmlns:a16="http://schemas.microsoft.com/office/drawing/2014/main" id="{8F619895-DF63-4B9A-B243-022AC6679C3D}"/>
+              </a:ext>
+            </a:extLst>
+          </p:cNvPr>
+          <p:cNvCxnSpPr>
+            <a:cxnSpLocks/>
+          </p:cNvCxnSpPr>
+          <p:nvPr/>
+        </p:nvCxnSpPr>
+        <p:spPr>
+          <a:xfrm>
+            <a:off x="2661310" y="5035435"/>
+            <a:ext cx="127000" cy="67736"/>
+          </a:xfrm>
+          <a:prstGeom prst="line">
+            <a:avLst/>
+          </a:prstGeom>
+        </p:spPr>
+        <p:style>
+          <a:lnRef idx="3">
+            <a:schemeClr val="dk1"/>
+          </a:lnRef>
+          <a:fillRef idx="0">
+            <a:schemeClr val="dk1"/>
+          </a:fillRef>
+          <a:effectRef idx="2">
+            <a:schemeClr val="dk1"/>
+          </a:effectRef>
+          <a:fontRef idx="minor">
+            <a:schemeClr val="tx1"/>
+          </a:fontRef>
+        </p:style>
+      </p:cxnSp>
+      <p:sp>
+        <p:nvSpPr>
+          <p:cNvPr id="38" name="TextBox 37">
+            <a:extLst>
+              <a:ext uri="{FF2B5EF4-FFF2-40B4-BE49-F238E27FC236}">
+                <a16:creationId xmlns:a16="http://schemas.microsoft.com/office/drawing/2014/main" id="{5BD02CB2-DC19-4A6B-947E-876673DDCC7B}"/>
+              </a:ext>
+            </a:extLst>
+          </p:cNvPr>
+          <p:cNvSpPr txBox="1"/>
+          <p:nvPr/>
+        </p:nvSpPr>
+        <p:spPr>
+          <a:xfrm flipH="1">
+            <a:off x="2597814" y="4886778"/>
+            <a:ext cx="194730" cy="215444"/>
+          </a:xfrm>
+          <a:prstGeom prst="rect">
+            <a:avLst/>
+          </a:prstGeom>
+          <a:noFill/>
+        </p:spPr>
+        <p:txBody>
+          <a:bodyPr wrap="square" rtlCol="0">
+            <a:spAutoFit/>
+          </a:bodyPr>
+          <a:lstStyle/>
+          <a:p>
+            <a:r>
+              <a:rPr lang="en-US" altLang="ko-KR" sz="800" b="1" dirty="0"/>
+              <a:t>N</a:t>
+            </a:r>
+            <a:endParaRPr lang="ko-KR" altLang="en-US" sz="800" b="1" dirty="0"/>
+          </a:p>
+        </p:txBody>
+      </p:sp>
+      <p:sp>
+        <p:nvSpPr>
+          <p:cNvPr id="40" name="TextBox 39">
+            <a:extLst>
+              <a:ext uri="{FF2B5EF4-FFF2-40B4-BE49-F238E27FC236}">
+                <a16:creationId xmlns:a16="http://schemas.microsoft.com/office/drawing/2014/main" id="{9933064E-F8F5-460C-8A5C-FBD784CABEC6}"/>
+              </a:ext>
+            </a:extLst>
+          </p:cNvPr>
+          <p:cNvSpPr txBox="1"/>
+          <p:nvPr/>
+        </p:nvSpPr>
+        <p:spPr>
+          <a:xfrm flipH="1">
+            <a:off x="2615532" y="4543095"/>
+            <a:ext cx="194730" cy="215444"/>
+          </a:xfrm>
+          <a:prstGeom prst="rect">
+            <a:avLst/>
+          </a:prstGeom>
+          <a:noFill/>
+        </p:spPr>
+        <p:txBody>
+          <a:bodyPr wrap="square" rtlCol="0">
+            <a:spAutoFit/>
+          </a:bodyPr>
+          <a:lstStyle/>
+          <a:p>
+            <a:r>
+              <a:rPr lang="en-US" altLang="ko-KR" sz="800" b="1" dirty="0"/>
+              <a:t>1</a:t>
+            </a:r>
+            <a:endParaRPr lang="ko-KR" altLang="en-US" sz="800" b="1" dirty="0"/>
+          </a:p>
+        </p:txBody>
+      </p:sp>
+      <p:cxnSp>
+        <p:nvCxnSpPr>
+          <p:cNvPr id="41" name="직선 연결선 40">
+            <a:extLst>
+              <a:ext uri="{FF2B5EF4-FFF2-40B4-BE49-F238E27FC236}">
+                <a16:creationId xmlns:a16="http://schemas.microsoft.com/office/drawing/2014/main" id="{17F95092-5790-4429-A891-272607810D53}"/>
+              </a:ext>
+            </a:extLst>
+          </p:cNvPr>
+          <p:cNvCxnSpPr>
+            <a:cxnSpLocks/>
+          </p:cNvCxnSpPr>
+          <p:nvPr/>
+        </p:nvCxnSpPr>
+        <p:spPr>
+          <a:xfrm>
+            <a:off x="2661310" y="4600402"/>
+            <a:ext cx="0" cy="471278"/>
+          </a:xfrm>
+          <a:prstGeom prst="line">
+            <a:avLst/>
+          </a:prstGeom>
+          <a:ln/>
+        </p:spPr>
+        <p:style>
+          <a:lnRef idx="3">
+            <a:schemeClr val="dk1"/>
+          </a:lnRef>
+          <a:fillRef idx="0">
+            <a:schemeClr val="dk1"/>
+          </a:fillRef>
+          <a:effectRef idx="2">
+            <a:schemeClr val="dk1"/>
+          </a:effectRef>
+          <a:fontRef idx="minor">
+            <a:schemeClr val="tx1"/>
+          </a:fontRef>
+        </p:style>
+      </p:cxnSp>
     </p:spTree>
     <p:extLst>
       <p:ext uri="{BB962C8B-B14F-4D97-AF65-F5344CB8AC3E}">
